--- a/synthese/Presentation.pptx
+++ b/synthese/Presentation.pptx
@@ -2189,6 +2189,9 @@
         <a:lstStyle/>
         <a:p>
           <a:pPr>
+            <a:lnSpc>
+              <a:spcPct val="100000"/>
+            </a:lnSpc>
             <a:defRPr cap="all"/>
           </a:pPr>
           <a:r>
@@ -2229,13 +2232,16 @@
         <a:lstStyle/>
         <a:p>
           <a:pPr>
+            <a:lnSpc>
+              <a:spcPct val="100000"/>
+            </a:lnSpc>
             <a:defRPr cap="all"/>
           </a:pPr>
           <a:r>
-            <a:rPr lang="fr-CA"/>
-            <a:t>Créer des tâches et évènements personnelles</a:t>
+            <a:rPr lang="fr-CA" dirty="0"/>
+            <a:t>Gérer des tâches et évènements personnelles</a:t>
           </a:r>
-          <a:endParaRPr lang="en-US"/>
+          <a:endParaRPr lang="en-US" dirty="0"/>
         </a:p>
       </dgm:t>
     </dgm:pt>
@@ -2269,13 +2275,16 @@
         <a:lstStyle/>
         <a:p>
           <a:pPr>
+            <a:lnSpc>
+              <a:spcPct val="100000"/>
+            </a:lnSpc>
             <a:defRPr cap="all"/>
           </a:pPr>
           <a:r>
-            <a:rPr lang="fr-CA"/>
-            <a:t>Créer des groupes / Rejoindre des groupes</a:t>
+            <a:rPr lang="fr-CA" dirty="0"/>
+            <a:t>Gérer des groupes</a:t>
           </a:r>
-          <a:endParaRPr lang="en-US"/>
+          <a:endParaRPr lang="en-US" dirty="0"/>
         </a:p>
       </dgm:t>
     </dgm:pt>
@@ -2309,13 +2318,16 @@
         <a:lstStyle/>
         <a:p>
           <a:pPr>
+            <a:lnSpc>
+              <a:spcPct val="100000"/>
+            </a:lnSpc>
             <a:defRPr cap="all"/>
           </a:pPr>
           <a:r>
-            <a:rPr lang="fr-CA"/>
-            <a:t>Créer des tâches et des évènements de groupe</a:t>
+            <a:rPr lang="fr-CA" dirty="0"/>
+            <a:t>Gérer des tâches et des évènements de groupe</a:t>
           </a:r>
-          <a:endParaRPr lang="en-US"/>
+          <a:endParaRPr lang="en-US" dirty="0"/>
         </a:p>
       </dgm:t>
     </dgm:pt>
@@ -2341,6 +2353,61 @@
         </a:p>
       </dgm:t>
     </dgm:pt>
+    <dgm:pt modelId="{715DE299-3844-423D-AB4D-24346A2E2CE7}">
+      <dgm:prSet/>
+      <dgm:spPr/>
+      <dgm:t>
+        <a:bodyPr/>
+        <a:lstStyle/>
+        <a:p>
+          <a:pPr>
+            <a:lnSpc>
+              <a:spcPct val="100000"/>
+            </a:lnSpc>
+            <a:defRPr cap="all"/>
+          </a:pPr>
+          <a:r>
+            <a:rPr lang="en-CA" dirty="0"/>
+            <a:t>Chat </a:t>
+          </a:r>
+          <a:r>
+            <a:rPr lang="en-CA" dirty="0" err="1"/>
+            <a:t>en</a:t>
+          </a:r>
+          <a:r>
+            <a:rPr lang="en-CA" dirty="0"/>
+            <a:t> temps r</a:t>
+          </a:r>
+          <a:r>
+            <a:rPr lang="fr-CA" dirty="0" err="1"/>
+            <a:t>éelle</a:t>
+          </a:r>
+          <a:endParaRPr lang="en-US" dirty="0"/>
+        </a:p>
+      </dgm:t>
+    </dgm:pt>
+    <dgm:pt modelId="{8D2BB3F8-F096-4453-81B7-79BB8F0D73F8}" type="parTrans" cxnId="{C39EFDB0-061B-43E5-977D-DE49D2314960}">
+      <dgm:prSet/>
+      <dgm:spPr/>
+      <dgm:t>
+        <a:bodyPr/>
+        <a:lstStyle/>
+        <a:p>
+          <a:endParaRPr lang="en-US"/>
+        </a:p>
+      </dgm:t>
+    </dgm:pt>
+    <dgm:pt modelId="{56D383CA-97E9-4C3B-926E-A916A0D523B0}" type="sibTrans" cxnId="{C39EFDB0-061B-43E5-977D-DE49D2314960}">
+      <dgm:prSet/>
+      <dgm:spPr/>
+      <dgm:t>
+        <a:bodyPr/>
+        <a:lstStyle/>
+        <a:p>
+          <a:endParaRPr lang="en-US"/>
+        </a:p>
+      </dgm:t>
+    </dgm:pt>
     <dgm:pt modelId="{2E396AD6-EB67-412D-BA35-828FD3B2BE1B}" type="pres">
       <dgm:prSet presAssocID="{8F3BFF77-315C-489B-BDE7-567522DE083E}" presName="root" presStyleCnt="0">
         <dgm:presLayoutVars>
@@ -2355,7 +2422,7 @@
       <dgm:spPr/>
     </dgm:pt>
     <dgm:pt modelId="{221292C4-5A8E-45B8-9FF5-FFD164113293}" type="pres">
-      <dgm:prSet presAssocID="{ED94AED5-3896-4D9F-B77A-EDFA91FEF711}" presName="iconBgRect" presStyleLbl="bgShp" presStyleIdx="0" presStyleCnt="4"/>
+      <dgm:prSet presAssocID="{ED94AED5-3896-4D9F-B77A-EDFA91FEF711}" presName="iconBgRect" presStyleLbl="bgShp" presStyleIdx="0" presStyleCnt="5"/>
       <dgm:spPr>
         <a:prstGeom prst="round2DiagRect">
           <a:avLst>
@@ -2366,7 +2433,7 @@
       </dgm:spPr>
     </dgm:pt>
     <dgm:pt modelId="{E8096BDF-A9A4-4E64-B35D-32743B9B1397}" type="pres">
-      <dgm:prSet presAssocID="{ED94AED5-3896-4D9F-B77A-EDFA91FEF711}" presName="iconRect" presStyleLbl="node1" presStyleIdx="0" presStyleCnt="4"/>
+      <dgm:prSet presAssocID="{ED94AED5-3896-4D9F-B77A-EDFA91FEF711}" presName="iconRect" presStyleLbl="node1" presStyleIdx="0" presStyleCnt="5"/>
       <dgm:spPr>
         <a:blipFill>
           <a:blip xmlns:r="http://schemas.openxmlformats.org/officeDocument/2006/relationships" r:embed="rId1">
@@ -2398,7 +2465,7 @@
       <dgm:spPr/>
     </dgm:pt>
     <dgm:pt modelId="{DFBDB3BD-56A8-46C3-B51F-A1489367DC8B}" type="pres">
-      <dgm:prSet presAssocID="{ED94AED5-3896-4D9F-B77A-EDFA91FEF711}" presName="textRect" presStyleLbl="revTx" presStyleIdx="0" presStyleCnt="4">
+      <dgm:prSet presAssocID="{ED94AED5-3896-4D9F-B77A-EDFA91FEF711}" presName="textRect" presStyleLbl="revTx" presStyleIdx="0" presStyleCnt="5">
         <dgm:presLayoutVars>
           <dgm:chMax val="1"/>
           <dgm:chPref val="1"/>
@@ -2415,7 +2482,7 @@
       <dgm:spPr/>
     </dgm:pt>
     <dgm:pt modelId="{1C14FF70-1F6F-4A4E-BAED-C18CE7949C83}" type="pres">
-      <dgm:prSet presAssocID="{6B826AC4-3183-4B66-8083-EFC005CB75C2}" presName="iconBgRect" presStyleLbl="bgShp" presStyleIdx="1" presStyleCnt="4"/>
+      <dgm:prSet presAssocID="{6B826AC4-3183-4B66-8083-EFC005CB75C2}" presName="iconBgRect" presStyleLbl="bgShp" presStyleIdx="1" presStyleCnt="5"/>
       <dgm:spPr>
         <a:prstGeom prst="round2DiagRect">
           <a:avLst>
@@ -2426,7 +2493,7 @@
       </dgm:spPr>
     </dgm:pt>
     <dgm:pt modelId="{3048368D-580C-4D7E-9335-F74708014307}" type="pres">
-      <dgm:prSet presAssocID="{6B826AC4-3183-4B66-8083-EFC005CB75C2}" presName="iconRect" presStyleLbl="node1" presStyleIdx="1" presStyleCnt="4"/>
+      <dgm:prSet presAssocID="{6B826AC4-3183-4B66-8083-EFC005CB75C2}" presName="iconRect" presStyleLbl="node1" presStyleIdx="1" presStyleCnt="5"/>
       <dgm:spPr>
         <a:blipFill>
           <a:blip xmlns:r="http://schemas.openxmlformats.org/officeDocument/2006/relationships" r:embed="rId3">
@@ -2458,7 +2525,7 @@
       <dgm:spPr/>
     </dgm:pt>
     <dgm:pt modelId="{0F82F0B1-E95A-46E4-BAE6-979AC034D912}" type="pres">
-      <dgm:prSet presAssocID="{6B826AC4-3183-4B66-8083-EFC005CB75C2}" presName="textRect" presStyleLbl="revTx" presStyleIdx="1" presStyleCnt="4">
+      <dgm:prSet presAssocID="{6B826AC4-3183-4B66-8083-EFC005CB75C2}" presName="textRect" presStyleLbl="revTx" presStyleIdx="1" presStyleCnt="5">
         <dgm:presLayoutVars>
           <dgm:chMax val="1"/>
           <dgm:chPref val="1"/>
@@ -2475,7 +2542,7 @@
       <dgm:spPr/>
     </dgm:pt>
     <dgm:pt modelId="{E6F2D14D-F2B7-47C1-84A0-15CF722EA4D5}" type="pres">
-      <dgm:prSet presAssocID="{B353E3AA-60FE-4EC1-A9E7-018F03B98858}" presName="iconBgRect" presStyleLbl="bgShp" presStyleIdx="2" presStyleCnt="4"/>
+      <dgm:prSet presAssocID="{B353E3AA-60FE-4EC1-A9E7-018F03B98858}" presName="iconBgRect" presStyleLbl="bgShp" presStyleIdx="2" presStyleCnt="5"/>
       <dgm:spPr>
         <a:prstGeom prst="round2DiagRect">
           <a:avLst>
@@ -2486,7 +2553,7 @@
       </dgm:spPr>
     </dgm:pt>
     <dgm:pt modelId="{583D9E21-971A-4361-A9E9-EE513EAA3E73}" type="pres">
-      <dgm:prSet presAssocID="{B353E3AA-60FE-4EC1-A9E7-018F03B98858}" presName="iconRect" presStyleLbl="node1" presStyleIdx="2" presStyleCnt="4"/>
+      <dgm:prSet presAssocID="{B353E3AA-60FE-4EC1-A9E7-018F03B98858}" presName="iconRect" presStyleLbl="node1" presStyleIdx="2" presStyleCnt="5"/>
       <dgm:spPr>
         <a:blipFill>
           <a:blip xmlns:r="http://schemas.openxmlformats.org/officeDocument/2006/relationships" r:embed="rId5">
@@ -2518,7 +2585,7 @@
       <dgm:spPr/>
     </dgm:pt>
     <dgm:pt modelId="{9EAC9048-4A46-495A-9774-E9594D9BBDD7}" type="pres">
-      <dgm:prSet presAssocID="{B353E3AA-60FE-4EC1-A9E7-018F03B98858}" presName="textRect" presStyleLbl="revTx" presStyleIdx="2" presStyleCnt="4">
+      <dgm:prSet presAssocID="{B353E3AA-60FE-4EC1-A9E7-018F03B98858}" presName="textRect" presStyleLbl="revTx" presStyleIdx="2" presStyleCnt="5">
         <dgm:presLayoutVars>
           <dgm:chMax val="1"/>
           <dgm:chPref val="1"/>
@@ -2535,7 +2602,7 @@
       <dgm:spPr/>
     </dgm:pt>
     <dgm:pt modelId="{999034A3-FEBE-40BD-80F1-55DA17190A71}" type="pres">
-      <dgm:prSet presAssocID="{38D44C31-E153-4D17-8DDA-1A97B0BAB002}" presName="iconBgRect" presStyleLbl="bgShp" presStyleIdx="3" presStyleCnt="4"/>
+      <dgm:prSet presAssocID="{38D44C31-E153-4D17-8DDA-1A97B0BAB002}" presName="iconBgRect" presStyleLbl="bgShp" presStyleIdx="3" presStyleCnt="5"/>
       <dgm:spPr>
         <a:prstGeom prst="round2DiagRect">
           <a:avLst>
@@ -2546,7 +2613,7 @@
       </dgm:spPr>
     </dgm:pt>
     <dgm:pt modelId="{BE734C81-0AD6-4498-912A-40FA0704F7F7}" type="pres">
-      <dgm:prSet presAssocID="{38D44C31-E153-4D17-8DDA-1A97B0BAB002}" presName="iconRect" presStyleLbl="node1" presStyleIdx="3" presStyleCnt="4"/>
+      <dgm:prSet presAssocID="{38D44C31-E153-4D17-8DDA-1A97B0BAB002}" presName="iconRect" presStyleLbl="node1" presStyleIdx="3" presStyleCnt="5"/>
       <dgm:spPr>
         <a:blipFill>
           <a:blip xmlns:r="http://schemas.openxmlformats.org/officeDocument/2006/relationships" r:embed="rId7">
@@ -2578,7 +2645,65 @@
       <dgm:spPr/>
     </dgm:pt>
     <dgm:pt modelId="{731B891D-21C3-4076-8412-E3C58EFBEC90}" type="pres">
-      <dgm:prSet presAssocID="{38D44C31-E153-4D17-8DDA-1A97B0BAB002}" presName="textRect" presStyleLbl="revTx" presStyleIdx="3" presStyleCnt="4">
+      <dgm:prSet presAssocID="{38D44C31-E153-4D17-8DDA-1A97B0BAB002}" presName="textRect" presStyleLbl="revTx" presStyleIdx="3" presStyleCnt="5">
+        <dgm:presLayoutVars>
+          <dgm:chMax val="1"/>
+          <dgm:chPref val="1"/>
+        </dgm:presLayoutVars>
+      </dgm:prSet>
+      <dgm:spPr/>
+    </dgm:pt>
+    <dgm:pt modelId="{4F9614B2-85D4-49BD-B561-34DAA6827A36}" type="pres">
+      <dgm:prSet presAssocID="{076C8DAD-57B9-453F-961A-FE6A32AD97B1}" presName="sibTrans" presStyleCnt="0"/>
+      <dgm:spPr/>
+    </dgm:pt>
+    <dgm:pt modelId="{FE3BFABE-8D27-4526-B060-EBFD42028608}" type="pres">
+      <dgm:prSet presAssocID="{715DE299-3844-423D-AB4D-24346A2E2CE7}" presName="compNode" presStyleCnt="0"/>
+      <dgm:spPr/>
+    </dgm:pt>
+    <dgm:pt modelId="{B0F85070-72A9-46F3-9873-2A42EA84BFE1}" type="pres">
+      <dgm:prSet presAssocID="{715DE299-3844-423D-AB4D-24346A2E2CE7}" presName="iconBgRect" presStyleLbl="bgShp" presStyleIdx="4" presStyleCnt="5"/>
+      <dgm:spPr>
+        <a:prstGeom prst="round2DiagRect">
+          <a:avLst>
+            <a:gd name="adj1" fmla="val 29727"/>
+            <a:gd name="adj2" fmla="val 0"/>
+          </a:avLst>
+        </a:prstGeom>
+      </dgm:spPr>
+    </dgm:pt>
+    <dgm:pt modelId="{737D955B-A71D-4147-A0EC-5C5E110D9B87}" type="pres">
+      <dgm:prSet presAssocID="{715DE299-3844-423D-AB4D-24346A2E2CE7}" presName="iconRect" presStyleLbl="node1" presStyleIdx="4" presStyleCnt="5"/>
+      <dgm:spPr>
+        <a:blipFill>
+          <a:blip xmlns:r="http://schemas.openxmlformats.org/officeDocument/2006/relationships" r:embed="rId9">
+            <a:extLst>
+              <a:ext uri="{28A0092B-C50C-407E-A947-70E740481C1C}">
+                <a14:useLocalDpi xmlns:a14="http://schemas.microsoft.com/office/drawing/2010/main" val="0"/>
+              </a:ext>
+              <a:ext uri="{96DAC541-7B7A-43D3-8B79-37D633B846F1}">
+                <asvg:svgBlip xmlns:asvg="http://schemas.microsoft.com/office/drawing/2016/SVG/main" r:embed="rId10"/>
+              </a:ext>
+            </a:extLst>
+          </a:blip>
+          <a:srcRect/>
+          <a:stretch>
+            <a:fillRect/>
+          </a:stretch>
+        </a:blipFill>
+      </dgm:spPr>
+      <dgm:extLst>
+        <a:ext uri="{E40237B7-FDA0-4F09-8148-C483321AD2D9}">
+          <dgm14:cNvPr xmlns:dgm14="http://schemas.microsoft.com/office/drawing/2010/diagram" id="0" name="" descr="Chat avec un remplissage uni"/>
+        </a:ext>
+      </dgm:extLst>
+    </dgm:pt>
+    <dgm:pt modelId="{E5F08522-2685-45EC-B2B6-34210E2AC97F}" type="pres">
+      <dgm:prSet presAssocID="{715DE299-3844-423D-AB4D-24346A2E2CE7}" presName="spaceRect" presStyleCnt="0"/>
+      <dgm:spPr/>
+    </dgm:pt>
+    <dgm:pt modelId="{7B51D551-E7FF-492B-8EF0-7C0788E58E24}" type="pres">
+      <dgm:prSet presAssocID="{715DE299-3844-423D-AB4D-24346A2E2CE7}" presName="textRect" presStyleLbl="revTx" presStyleIdx="4" presStyleCnt="5">
         <dgm:presLayoutVars>
           <dgm:chMax val="1"/>
           <dgm:chPref val="1"/>
@@ -2588,38 +2713,46 @@
     </dgm:pt>
   </dgm:ptLst>
   <dgm:cxnLst>
-    <dgm:cxn modelId="{8533DB01-7A26-4D58-85CE-9CBDC95210BB}" type="presOf" srcId="{8F3BFF77-315C-489B-BDE7-567522DE083E}" destId="{2E396AD6-EB67-412D-BA35-828FD3B2BE1B}" srcOrd="0" destOrd="0" presId="urn:microsoft.com/office/officeart/2018/5/layout/IconLeafLabelList"/>
     <dgm:cxn modelId="{830AAE0B-2E9D-45C8-A0C3-1CDE6F7C7F93}" srcId="{8F3BFF77-315C-489B-BDE7-567522DE083E}" destId="{ED94AED5-3896-4D9F-B77A-EDFA91FEF711}" srcOrd="0" destOrd="0" parTransId="{22935CDC-7723-4579-AD88-1F5B3BD71B06}" sibTransId="{B641CB94-4AC4-4571-BCDD-83D2DD743653}"/>
-    <dgm:cxn modelId="{70B32531-3CA4-4D64-B09B-CE7B35E4AD9B}" type="presOf" srcId="{6B826AC4-3183-4B66-8083-EFC005CB75C2}" destId="{0F82F0B1-E95A-46E4-BAE6-979AC034D912}" srcOrd="0" destOrd="0" presId="urn:microsoft.com/office/officeart/2018/5/layout/IconLeafLabelList"/>
-    <dgm:cxn modelId="{BC9B4D3F-BD55-44EC-B4B4-DD799F93DE34}" type="presOf" srcId="{ED94AED5-3896-4D9F-B77A-EDFA91FEF711}" destId="{DFBDB3BD-56A8-46C3-B51F-A1489367DC8B}" srcOrd="0" destOrd="0" presId="urn:microsoft.com/office/officeart/2018/5/layout/IconLeafLabelList"/>
-    <dgm:cxn modelId="{0C93465C-3303-4C64-AD27-E84FE7FE64E8}" type="presOf" srcId="{38D44C31-E153-4D17-8DDA-1A97B0BAB002}" destId="{731B891D-21C3-4076-8412-E3C58EFBEC90}" srcOrd="0" destOrd="0" presId="urn:microsoft.com/office/officeart/2018/5/layout/IconLeafLabelList"/>
-    <dgm:cxn modelId="{C9E5FF51-1A4C-457A-94AF-FAEC93FE45CC}" type="presOf" srcId="{B353E3AA-60FE-4EC1-A9E7-018F03B98858}" destId="{9EAC9048-4A46-495A-9774-E9594D9BBDD7}" srcOrd="0" destOrd="0" presId="urn:microsoft.com/office/officeart/2018/5/layout/IconLeafLabelList"/>
+    <dgm:cxn modelId="{9E72832D-A071-4E21-B362-26544D601414}" type="presOf" srcId="{38D44C31-E153-4D17-8DDA-1A97B0BAB002}" destId="{731B891D-21C3-4076-8412-E3C58EFBEC90}" srcOrd="0" destOrd="0" presId="urn:microsoft.com/office/officeart/2018/5/layout/IconLeafLabelList"/>
+    <dgm:cxn modelId="{3391A07C-822A-4109-873A-1C62720509F7}" type="presOf" srcId="{715DE299-3844-423D-AB4D-24346A2E2CE7}" destId="{7B51D551-E7FF-492B-8EF0-7C0788E58E24}" srcOrd="0" destOrd="0" presId="urn:microsoft.com/office/officeart/2018/5/layout/IconLeafLabelList"/>
     <dgm:cxn modelId="{C46D89A2-C05F-43A7-A0A6-1E8F826B1A51}" srcId="{8F3BFF77-315C-489B-BDE7-567522DE083E}" destId="{6B826AC4-3183-4B66-8083-EFC005CB75C2}" srcOrd="1" destOrd="0" parTransId="{AAB68433-99A3-447C-851D-E4DA1B3C3640}" sibTransId="{ECD6286C-C202-4A7F-B6EC-C1AF648533AA}"/>
     <dgm:cxn modelId="{64C521A3-7D46-47DD-92AA-B5095903061C}" srcId="{8F3BFF77-315C-489B-BDE7-567522DE083E}" destId="{B353E3AA-60FE-4EC1-A9E7-018F03B98858}" srcOrd="2" destOrd="0" parTransId="{0855E5DF-3F07-4651-8C10-A3593F776A53}" sibTransId="{4740AACA-3C6F-4F4B-BFFA-FC1E7DFA6C59}"/>
+    <dgm:cxn modelId="{79B19EAF-78B8-4486-A3C2-5262E8B74FBA}" type="presOf" srcId="{8F3BFF77-315C-489B-BDE7-567522DE083E}" destId="{2E396AD6-EB67-412D-BA35-828FD3B2BE1B}" srcOrd="0" destOrd="0" presId="urn:microsoft.com/office/officeart/2018/5/layout/IconLeafLabelList"/>
+    <dgm:cxn modelId="{C39EFDB0-061B-43E5-977D-DE49D2314960}" srcId="{8F3BFF77-315C-489B-BDE7-567522DE083E}" destId="{715DE299-3844-423D-AB4D-24346A2E2CE7}" srcOrd="4" destOrd="0" parTransId="{8D2BB3F8-F096-4453-81B7-79BB8F0D73F8}" sibTransId="{56D383CA-97E9-4C3B-926E-A916A0D523B0}"/>
+    <dgm:cxn modelId="{C3518EB7-9EA3-42C1-AFDD-B234394751F9}" type="presOf" srcId="{6B826AC4-3183-4B66-8083-EFC005CB75C2}" destId="{0F82F0B1-E95A-46E4-BAE6-979AC034D912}" srcOrd="0" destOrd="0" presId="urn:microsoft.com/office/officeart/2018/5/layout/IconLeafLabelList"/>
+    <dgm:cxn modelId="{687C8FCF-B1A7-4193-B43A-AC9A8693F4AB}" type="presOf" srcId="{B353E3AA-60FE-4EC1-A9E7-018F03B98858}" destId="{9EAC9048-4A46-495A-9774-E9594D9BBDD7}" srcOrd="0" destOrd="0" presId="urn:microsoft.com/office/officeart/2018/5/layout/IconLeafLabelList"/>
     <dgm:cxn modelId="{90FEA4EC-FFB1-4AED-86BC-C6AC71DB92DB}" srcId="{8F3BFF77-315C-489B-BDE7-567522DE083E}" destId="{38D44C31-E153-4D17-8DDA-1A97B0BAB002}" srcOrd="3" destOrd="0" parTransId="{747CB63D-C944-40E8-97E0-74625F4F5DEF}" sibTransId="{076C8DAD-57B9-453F-961A-FE6A32AD97B1}"/>
-    <dgm:cxn modelId="{565BD0DC-3C40-4673-AFDF-2C6860CFA9E9}" type="presParOf" srcId="{2E396AD6-EB67-412D-BA35-828FD3B2BE1B}" destId="{2DBD5325-DC73-44D1-8830-89836450E4B7}" srcOrd="0" destOrd="0" presId="urn:microsoft.com/office/officeart/2018/5/layout/IconLeafLabelList"/>
-    <dgm:cxn modelId="{D08E6986-B15B-4F51-9A2E-759BDFBFE031}" type="presParOf" srcId="{2DBD5325-DC73-44D1-8830-89836450E4B7}" destId="{221292C4-5A8E-45B8-9FF5-FFD164113293}" srcOrd="0" destOrd="0" presId="urn:microsoft.com/office/officeart/2018/5/layout/IconLeafLabelList"/>
-    <dgm:cxn modelId="{BE0AFB5D-AE19-4913-A99E-A71ABB97FBA3}" type="presParOf" srcId="{2DBD5325-DC73-44D1-8830-89836450E4B7}" destId="{E8096BDF-A9A4-4E64-B35D-32743B9B1397}" srcOrd="1" destOrd="0" presId="urn:microsoft.com/office/officeart/2018/5/layout/IconLeafLabelList"/>
-    <dgm:cxn modelId="{D5C5347D-2D95-41AF-B4B3-4B2A4E93F77A}" type="presParOf" srcId="{2DBD5325-DC73-44D1-8830-89836450E4B7}" destId="{C4A52450-C6B9-4FCB-BBCA-8042D82F0CE9}" srcOrd="2" destOrd="0" presId="urn:microsoft.com/office/officeart/2018/5/layout/IconLeafLabelList"/>
-    <dgm:cxn modelId="{5BE0DF3E-5FAF-4D41-AEAB-F5AA7CC0FD09}" type="presParOf" srcId="{2DBD5325-DC73-44D1-8830-89836450E4B7}" destId="{DFBDB3BD-56A8-46C3-B51F-A1489367DC8B}" srcOrd="3" destOrd="0" presId="urn:microsoft.com/office/officeart/2018/5/layout/IconLeafLabelList"/>
-    <dgm:cxn modelId="{B298282D-7EF5-4F07-8F85-7C4F7ED3237C}" type="presParOf" srcId="{2E396AD6-EB67-412D-BA35-828FD3B2BE1B}" destId="{62A7E1CE-26FF-415F-B7A1-7759D61FAE9D}" srcOrd="1" destOrd="0" presId="urn:microsoft.com/office/officeart/2018/5/layout/IconLeafLabelList"/>
-    <dgm:cxn modelId="{0ED14139-3DDB-47A7-A6EA-D9CFC7D35EFF}" type="presParOf" srcId="{2E396AD6-EB67-412D-BA35-828FD3B2BE1B}" destId="{B03CF141-5045-41DC-B201-39166635A537}" srcOrd="2" destOrd="0" presId="urn:microsoft.com/office/officeart/2018/5/layout/IconLeafLabelList"/>
-    <dgm:cxn modelId="{EF00601E-DF6B-4CF9-999A-7512674CE3BA}" type="presParOf" srcId="{B03CF141-5045-41DC-B201-39166635A537}" destId="{1C14FF70-1F6F-4A4E-BAED-C18CE7949C83}" srcOrd="0" destOrd="0" presId="urn:microsoft.com/office/officeart/2018/5/layout/IconLeafLabelList"/>
-    <dgm:cxn modelId="{DD1CA478-FD3F-422F-9336-4F76428061AA}" type="presParOf" srcId="{B03CF141-5045-41DC-B201-39166635A537}" destId="{3048368D-580C-4D7E-9335-F74708014307}" srcOrd="1" destOrd="0" presId="urn:microsoft.com/office/officeart/2018/5/layout/IconLeafLabelList"/>
-    <dgm:cxn modelId="{A127B678-B2AD-445C-80AC-CF72B9B25678}" type="presParOf" srcId="{B03CF141-5045-41DC-B201-39166635A537}" destId="{C7F7824B-CB38-414D-95C5-4FE2BF74BB47}" srcOrd="2" destOrd="0" presId="urn:microsoft.com/office/officeart/2018/5/layout/IconLeafLabelList"/>
-    <dgm:cxn modelId="{695465BC-3A22-450B-8A5C-8A7089EB1787}" type="presParOf" srcId="{B03CF141-5045-41DC-B201-39166635A537}" destId="{0F82F0B1-E95A-46E4-BAE6-979AC034D912}" srcOrd="3" destOrd="0" presId="urn:microsoft.com/office/officeart/2018/5/layout/IconLeafLabelList"/>
-    <dgm:cxn modelId="{CA4D0F8B-6AE8-4689-943A-7BA54C9E6239}" type="presParOf" srcId="{2E396AD6-EB67-412D-BA35-828FD3B2BE1B}" destId="{4A8C1880-D8E3-479E-89DF-5DADEF14F5B6}" srcOrd="3" destOrd="0" presId="urn:microsoft.com/office/officeart/2018/5/layout/IconLeafLabelList"/>
-    <dgm:cxn modelId="{271F3E96-1992-4097-9742-34BA48786DC4}" type="presParOf" srcId="{2E396AD6-EB67-412D-BA35-828FD3B2BE1B}" destId="{B7B19756-A70B-44DE-B03B-99CF93839A89}" srcOrd="4" destOrd="0" presId="urn:microsoft.com/office/officeart/2018/5/layout/IconLeafLabelList"/>
-    <dgm:cxn modelId="{18D4E64D-1D86-41E0-A214-A5CB531E54B6}" type="presParOf" srcId="{B7B19756-A70B-44DE-B03B-99CF93839A89}" destId="{E6F2D14D-F2B7-47C1-84A0-15CF722EA4D5}" srcOrd="0" destOrd="0" presId="urn:microsoft.com/office/officeart/2018/5/layout/IconLeafLabelList"/>
-    <dgm:cxn modelId="{C0A13894-C735-4DE6-8B04-9D2AD79C4036}" type="presParOf" srcId="{B7B19756-A70B-44DE-B03B-99CF93839A89}" destId="{583D9E21-971A-4361-A9E9-EE513EAA3E73}" srcOrd="1" destOrd="0" presId="urn:microsoft.com/office/officeart/2018/5/layout/IconLeafLabelList"/>
-    <dgm:cxn modelId="{0A61A30E-3739-4F68-9C45-EB791E9E35CB}" type="presParOf" srcId="{B7B19756-A70B-44DE-B03B-99CF93839A89}" destId="{5A1BF6B1-D3AC-4738-B173-4426C681DC7B}" srcOrd="2" destOrd="0" presId="urn:microsoft.com/office/officeart/2018/5/layout/IconLeafLabelList"/>
-    <dgm:cxn modelId="{3A901474-20AE-4B59-9684-F8DCB3356381}" type="presParOf" srcId="{B7B19756-A70B-44DE-B03B-99CF93839A89}" destId="{9EAC9048-4A46-495A-9774-E9594D9BBDD7}" srcOrd="3" destOrd="0" presId="urn:microsoft.com/office/officeart/2018/5/layout/IconLeafLabelList"/>
-    <dgm:cxn modelId="{1260068D-8C17-4E84-95C1-6D9909E67E44}" type="presParOf" srcId="{2E396AD6-EB67-412D-BA35-828FD3B2BE1B}" destId="{9B194B58-D5AE-442C-AB12-868921829AB2}" srcOrd="5" destOrd="0" presId="urn:microsoft.com/office/officeart/2018/5/layout/IconLeafLabelList"/>
-    <dgm:cxn modelId="{CB01C976-37A0-42FC-BDCD-FC91C37356F8}" type="presParOf" srcId="{2E396AD6-EB67-412D-BA35-828FD3B2BE1B}" destId="{20D93965-89DC-423A-919F-84C31BB99EFA}" srcOrd="6" destOrd="0" presId="urn:microsoft.com/office/officeart/2018/5/layout/IconLeafLabelList"/>
-    <dgm:cxn modelId="{769E08DC-D871-4D45-9C5E-12B95CE6FBAB}" type="presParOf" srcId="{20D93965-89DC-423A-919F-84C31BB99EFA}" destId="{999034A3-FEBE-40BD-80F1-55DA17190A71}" srcOrd="0" destOrd="0" presId="urn:microsoft.com/office/officeart/2018/5/layout/IconLeafLabelList"/>
-    <dgm:cxn modelId="{9F87CB1C-05FC-4B75-AD1B-C24ADB69004E}" type="presParOf" srcId="{20D93965-89DC-423A-919F-84C31BB99EFA}" destId="{BE734C81-0AD6-4498-912A-40FA0704F7F7}" srcOrd="1" destOrd="0" presId="urn:microsoft.com/office/officeart/2018/5/layout/IconLeafLabelList"/>
-    <dgm:cxn modelId="{5167C010-C513-4D8E-8EAE-A57D45D625BC}" type="presParOf" srcId="{20D93965-89DC-423A-919F-84C31BB99EFA}" destId="{5B2D7239-35A4-4AF5-9EE8-355C31C5A87C}" srcOrd="2" destOrd="0" presId="urn:microsoft.com/office/officeart/2018/5/layout/IconLeafLabelList"/>
-    <dgm:cxn modelId="{9510E581-E2D7-4AB3-9ADF-FA0DA17A27E9}" type="presParOf" srcId="{20D93965-89DC-423A-919F-84C31BB99EFA}" destId="{731B891D-21C3-4076-8412-E3C58EFBEC90}" srcOrd="3" destOrd="0" presId="urn:microsoft.com/office/officeart/2018/5/layout/IconLeafLabelList"/>
+    <dgm:cxn modelId="{CC4BA9FF-19E1-4F6E-9080-FE79D383DF42}" type="presOf" srcId="{ED94AED5-3896-4D9F-B77A-EDFA91FEF711}" destId="{DFBDB3BD-56A8-46C3-B51F-A1489367DC8B}" srcOrd="0" destOrd="0" presId="urn:microsoft.com/office/officeart/2018/5/layout/IconLeafLabelList"/>
+    <dgm:cxn modelId="{D99022A4-83CA-4F30-BD7C-21E9CDE30C85}" type="presParOf" srcId="{2E396AD6-EB67-412D-BA35-828FD3B2BE1B}" destId="{2DBD5325-DC73-44D1-8830-89836450E4B7}" srcOrd="0" destOrd="0" presId="urn:microsoft.com/office/officeart/2018/5/layout/IconLeafLabelList"/>
+    <dgm:cxn modelId="{822FFE69-A089-4AA2-8D66-CCEED28A8708}" type="presParOf" srcId="{2DBD5325-DC73-44D1-8830-89836450E4B7}" destId="{221292C4-5A8E-45B8-9FF5-FFD164113293}" srcOrd="0" destOrd="0" presId="urn:microsoft.com/office/officeart/2018/5/layout/IconLeafLabelList"/>
+    <dgm:cxn modelId="{51A42122-F9E1-4EB5-919E-7E49BA6E2B6C}" type="presParOf" srcId="{2DBD5325-DC73-44D1-8830-89836450E4B7}" destId="{E8096BDF-A9A4-4E64-B35D-32743B9B1397}" srcOrd="1" destOrd="0" presId="urn:microsoft.com/office/officeart/2018/5/layout/IconLeafLabelList"/>
+    <dgm:cxn modelId="{EED1009E-3BC3-43FD-B3B7-8DBF0D56E397}" type="presParOf" srcId="{2DBD5325-DC73-44D1-8830-89836450E4B7}" destId="{C4A52450-C6B9-4FCB-BBCA-8042D82F0CE9}" srcOrd="2" destOrd="0" presId="urn:microsoft.com/office/officeart/2018/5/layout/IconLeafLabelList"/>
+    <dgm:cxn modelId="{9F4C57AE-9C3C-486D-89F6-3661CA8215D7}" type="presParOf" srcId="{2DBD5325-DC73-44D1-8830-89836450E4B7}" destId="{DFBDB3BD-56A8-46C3-B51F-A1489367DC8B}" srcOrd="3" destOrd="0" presId="urn:microsoft.com/office/officeart/2018/5/layout/IconLeafLabelList"/>
+    <dgm:cxn modelId="{FF5DEC69-B4D3-481E-8ECB-E73F557BCB51}" type="presParOf" srcId="{2E396AD6-EB67-412D-BA35-828FD3B2BE1B}" destId="{62A7E1CE-26FF-415F-B7A1-7759D61FAE9D}" srcOrd="1" destOrd="0" presId="urn:microsoft.com/office/officeart/2018/5/layout/IconLeafLabelList"/>
+    <dgm:cxn modelId="{3D7A8423-ED56-46DA-88EE-1C15908BECC0}" type="presParOf" srcId="{2E396AD6-EB67-412D-BA35-828FD3B2BE1B}" destId="{B03CF141-5045-41DC-B201-39166635A537}" srcOrd="2" destOrd="0" presId="urn:microsoft.com/office/officeart/2018/5/layout/IconLeafLabelList"/>
+    <dgm:cxn modelId="{07DCC1F0-D9DB-4847-B7D5-487AF430E73A}" type="presParOf" srcId="{B03CF141-5045-41DC-B201-39166635A537}" destId="{1C14FF70-1F6F-4A4E-BAED-C18CE7949C83}" srcOrd="0" destOrd="0" presId="urn:microsoft.com/office/officeart/2018/5/layout/IconLeafLabelList"/>
+    <dgm:cxn modelId="{D0AE094D-DE81-4379-A19A-67D61E71942B}" type="presParOf" srcId="{B03CF141-5045-41DC-B201-39166635A537}" destId="{3048368D-580C-4D7E-9335-F74708014307}" srcOrd="1" destOrd="0" presId="urn:microsoft.com/office/officeart/2018/5/layout/IconLeafLabelList"/>
+    <dgm:cxn modelId="{153C25AE-5696-4B05-BD99-319F7FF81CFA}" type="presParOf" srcId="{B03CF141-5045-41DC-B201-39166635A537}" destId="{C7F7824B-CB38-414D-95C5-4FE2BF74BB47}" srcOrd="2" destOrd="0" presId="urn:microsoft.com/office/officeart/2018/5/layout/IconLeafLabelList"/>
+    <dgm:cxn modelId="{2DF7AE0E-4435-46EC-9D41-CAB963F4F6F2}" type="presParOf" srcId="{B03CF141-5045-41DC-B201-39166635A537}" destId="{0F82F0B1-E95A-46E4-BAE6-979AC034D912}" srcOrd="3" destOrd="0" presId="urn:microsoft.com/office/officeart/2018/5/layout/IconLeafLabelList"/>
+    <dgm:cxn modelId="{E4F49F25-B50F-4D4F-B891-F9497F34B46F}" type="presParOf" srcId="{2E396AD6-EB67-412D-BA35-828FD3B2BE1B}" destId="{4A8C1880-D8E3-479E-89DF-5DADEF14F5B6}" srcOrd="3" destOrd="0" presId="urn:microsoft.com/office/officeart/2018/5/layout/IconLeafLabelList"/>
+    <dgm:cxn modelId="{A182445D-8302-4B56-8342-7E513E41449E}" type="presParOf" srcId="{2E396AD6-EB67-412D-BA35-828FD3B2BE1B}" destId="{B7B19756-A70B-44DE-B03B-99CF93839A89}" srcOrd="4" destOrd="0" presId="urn:microsoft.com/office/officeart/2018/5/layout/IconLeafLabelList"/>
+    <dgm:cxn modelId="{92AE9A42-8242-4C37-90F2-7EC275DC6948}" type="presParOf" srcId="{B7B19756-A70B-44DE-B03B-99CF93839A89}" destId="{E6F2D14D-F2B7-47C1-84A0-15CF722EA4D5}" srcOrd="0" destOrd="0" presId="urn:microsoft.com/office/officeart/2018/5/layout/IconLeafLabelList"/>
+    <dgm:cxn modelId="{F815A931-742F-40C1-834F-0641BDF9A7EC}" type="presParOf" srcId="{B7B19756-A70B-44DE-B03B-99CF93839A89}" destId="{583D9E21-971A-4361-A9E9-EE513EAA3E73}" srcOrd="1" destOrd="0" presId="urn:microsoft.com/office/officeart/2018/5/layout/IconLeafLabelList"/>
+    <dgm:cxn modelId="{534F0661-DC49-4F12-8CAC-A07E6E263D41}" type="presParOf" srcId="{B7B19756-A70B-44DE-B03B-99CF93839A89}" destId="{5A1BF6B1-D3AC-4738-B173-4426C681DC7B}" srcOrd="2" destOrd="0" presId="urn:microsoft.com/office/officeart/2018/5/layout/IconLeafLabelList"/>
+    <dgm:cxn modelId="{B6FED5B1-A173-4976-882E-0EC836A37D81}" type="presParOf" srcId="{B7B19756-A70B-44DE-B03B-99CF93839A89}" destId="{9EAC9048-4A46-495A-9774-E9594D9BBDD7}" srcOrd="3" destOrd="0" presId="urn:microsoft.com/office/officeart/2018/5/layout/IconLeafLabelList"/>
+    <dgm:cxn modelId="{0C483A07-E3B7-4811-9EC1-A09A3B51795F}" type="presParOf" srcId="{2E396AD6-EB67-412D-BA35-828FD3B2BE1B}" destId="{9B194B58-D5AE-442C-AB12-868921829AB2}" srcOrd="5" destOrd="0" presId="urn:microsoft.com/office/officeart/2018/5/layout/IconLeafLabelList"/>
+    <dgm:cxn modelId="{5D5D9001-25D3-4F71-887C-F0A5B6410ACA}" type="presParOf" srcId="{2E396AD6-EB67-412D-BA35-828FD3B2BE1B}" destId="{20D93965-89DC-423A-919F-84C31BB99EFA}" srcOrd="6" destOrd="0" presId="urn:microsoft.com/office/officeart/2018/5/layout/IconLeafLabelList"/>
+    <dgm:cxn modelId="{01C05F8F-D0AE-49CB-88F5-8B6951A20B39}" type="presParOf" srcId="{20D93965-89DC-423A-919F-84C31BB99EFA}" destId="{999034A3-FEBE-40BD-80F1-55DA17190A71}" srcOrd="0" destOrd="0" presId="urn:microsoft.com/office/officeart/2018/5/layout/IconLeafLabelList"/>
+    <dgm:cxn modelId="{DB8EAEE5-D27C-4404-95FE-A851640909B7}" type="presParOf" srcId="{20D93965-89DC-423A-919F-84C31BB99EFA}" destId="{BE734C81-0AD6-4498-912A-40FA0704F7F7}" srcOrd="1" destOrd="0" presId="urn:microsoft.com/office/officeart/2018/5/layout/IconLeafLabelList"/>
+    <dgm:cxn modelId="{96F1FF8B-B5F9-465D-BC7E-FDBFD1C07EDF}" type="presParOf" srcId="{20D93965-89DC-423A-919F-84C31BB99EFA}" destId="{5B2D7239-35A4-4AF5-9EE8-355C31C5A87C}" srcOrd="2" destOrd="0" presId="urn:microsoft.com/office/officeart/2018/5/layout/IconLeafLabelList"/>
+    <dgm:cxn modelId="{F30E4354-4975-4CE8-B6F2-2B4CE148871B}" type="presParOf" srcId="{20D93965-89DC-423A-919F-84C31BB99EFA}" destId="{731B891D-21C3-4076-8412-E3C58EFBEC90}" srcOrd="3" destOrd="0" presId="urn:microsoft.com/office/officeart/2018/5/layout/IconLeafLabelList"/>
+    <dgm:cxn modelId="{6D7EBF86-74DB-4292-813E-2F1974607789}" type="presParOf" srcId="{2E396AD6-EB67-412D-BA35-828FD3B2BE1B}" destId="{4F9614B2-85D4-49BD-B561-34DAA6827A36}" srcOrd="7" destOrd="0" presId="urn:microsoft.com/office/officeart/2018/5/layout/IconLeafLabelList"/>
+    <dgm:cxn modelId="{2D36394A-D5C9-4C10-B988-AE755121B638}" type="presParOf" srcId="{2E396AD6-EB67-412D-BA35-828FD3B2BE1B}" destId="{FE3BFABE-8D27-4526-B060-EBFD42028608}" srcOrd="8" destOrd="0" presId="urn:microsoft.com/office/officeart/2018/5/layout/IconLeafLabelList"/>
+    <dgm:cxn modelId="{A3144C9E-771D-40BE-A0D6-55F428B3E10E}" type="presParOf" srcId="{FE3BFABE-8D27-4526-B060-EBFD42028608}" destId="{B0F85070-72A9-46F3-9873-2A42EA84BFE1}" srcOrd="0" destOrd="0" presId="urn:microsoft.com/office/officeart/2018/5/layout/IconLeafLabelList"/>
+    <dgm:cxn modelId="{3C6CC526-FE81-4E36-AC1C-F7725D4E6492}" type="presParOf" srcId="{FE3BFABE-8D27-4526-B060-EBFD42028608}" destId="{737D955B-A71D-4147-A0EC-5C5E110D9B87}" srcOrd="1" destOrd="0" presId="urn:microsoft.com/office/officeart/2018/5/layout/IconLeafLabelList"/>
+    <dgm:cxn modelId="{9BA17AE2-EFA5-496B-B114-E6B61411754B}" type="presParOf" srcId="{FE3BFABE-8D27-4526-B060-EBFD42028608}" destId="{E5F08522-2685-45EC-B2B6-34210E2AC97F}" srcOrd="2" destOrd="0" presId="urn:microsoft.com/office/officeart/2018/5/layout/IconLeafLabelList"/>
+    <dgm:cxn modelId="{6F0B9863-FE61-4808-ADA1-4401E6E675D4}" type="presParOf" srcId="{FE3BFABE-8D27-4526-B060-EBFD42028608}" destId="{7B51D551-E7FF-492B-8EF0-7C0788E58E24}" srcOrd="3" destOrd="0" presId="urn:microsoft.com/office/officeart/2018/5/layout/IconLeafLabelList"/>
   </dgm:cxnLst>
   <dgm:bg/>
   <dgm:whole/>
@@ -3246,8 +3379,8 @@
       </dsp:nvSpPr>
       <dsp:spPr>
         <a:xfrm>
-          <a:off x="523095" y="459521"/>
-          <a:ext cx="1441902" cy="1441902"/>
+          <a:off x="631199" y="685031"/>
+          <a:ext cx="1098000" cy="1098000"/>
         </a:xfrm>
         <a:prstGeom prst="round2DiagRect">
           <a:avLst>
@@ -3288,8 +3421,8 @@
       </dsp:nvSpPr>
       <dsp:spPr>
         <a:xfrm>
-          <a:off x="830385" y="766811"/>
-          <a:ext cx="827321" cy="827321"/>
+          <a:off x="865200" y="919031"/>
+          <a:ext cx="630000" cy="630000"/>
         </a:xfrm>
         <a:prstGeom prst="rect">
           <a:avLst/>
@@ -3337,8 +3470,8 @@
       </dsp:nvSpPr>
       <dsp:spPr>
         <a:xfrm>
-          <a:off x="62159" y="2350541"/>
-          <a:ext cx="2363775" cy="720000"/>
+          <a:off x="280199" y="2125031"/>
+          <a:ext cx="1800000" cy="720000"/>
         </a:xfrm>
         <a:prstGeom prst="rect">
           <a:avLst/>
@@ -3367,9 +3500,9 @@
         </a:bodyPr>
         <a:lstStyle/>
         <a:p>
-          <a:pPr marL="0" lvl="0" indent="0" algn="ctr" defTabSz="755650">
+          <a:pPr marL="0" lvl="0" indent="0" algn="ctr" defTabSz="622300">
             <a:lnSpc>
-              <a:spcPct val="90000"/>
+              <a:spcPct val="100000"/>
             </a:lnSpc>
             <a:spcBef>
               <a:spcPct val="0"/>
@@ -3381,15 +3514,15 @@
             <a:defRPr cap="all"/>
           </a:pPr>
           <a:r>
-            <a:rPr lang="fr-CA" sz="1700" kern="1200"/>
+            <a:rPr lang="fr-CA" sz="1400" kern="1200"/>
             <a:t>Se connecter / S’enregistrer</a:t>
           </a:r>
-          <a:endParaRPr lang="en-US" sz="1700" kern="1200"/>
+          <a:endParaRPr lang="en-US" sz="1400" kern="1200"/>
         </a:p>
       </dsp:txBody>
       <dsp:txXfrm>
-        <a:off x="62159" y="2350541"/>
-        <a:ext cx="2363775" cy="720000"/>
+        <a:off x="280199" y="2125031"/>
+        <a:ext cx="1800000" cy="720000"/>
       </dsp:txXfrm>
     </dsp:sp>
     <dsp:sp modelId="{1C14FF70-1F6F-4A4E-BAED-C18CE7949C83}">
@@ -3399,8 +3532,8 @@
       </dsp:nvSpPr>
       <dsp:spPr>
         <a:xfrm>
-          <a:off x="3300530" y="459521"/>
-          <a:ext cx="1441902" cy="1441902"/>
+          <a:off x="2746200" y="685031"/>
+          <a:ext cx="1098000" cy="1098000"/>
         </a:xfrm>
         <a:prstGeom prst="round2DiagRect">
           <a:avLst>
@@ -3441,8 +3574,8 @@
       </dsp:nvSpPr>
       <dsp:spPr>
         <a:xfrm>
-          <a:off x="3607821" y="766811"/>
-          <a:ext cx="827321" cy="827321"/>
+          <a:off x="2980200" y="919031"/>
+          <a:ext cx="630000" cy="630000"/>
         </a:xfrm>
         <a:prstGeom prst="rect">
           <a:avLst/>
@@ -3490,8 +3623,8 @@
       </dsp:nvSpPr>
       <dsp:spPr>
         <a:xfrm>
-          <a:off x="2839594" y="2350541"/>
-          <a:ext cx="2363775" cy="720000"/>
+          <a:off x="2395200" y="2125031"/>
+          <a:ext cx="1800000" cy="720000"/>
         </a:xfrm>
         <a:prstGeom prst="rect">
           <a:avLst/>
@@ -3520,9 +3653,9 @@
         </a:bodyPr>
         <a:lstStyle/>
         <a:p>
-          <a:pPr marL="0" lvl="0" indent="0" algn="ctr" defTabSz="755650">
+          <a:pPr marL="0" lvl="0" indent="0" algn="ctr" defTabSz="622300">
             <a:lnSpc>
-              <a:spcPct val="90000"/>
+              <a:spcPct val="100000"/>
             </a:lnSpc>
             <a:spcBef>
               <a:spcPct val="0"/>
@@ -3534,15 +3667,15 @@
             <a:defRPr cap="all"/>
           </a:pPr>
           <a:r>
-            <a:rPr lang="fr-CA" sz="1700" kern="1200"/>
-            <a:t>Créer des tâches et évènements personnelles</a:t>
+            <a:rPr lang="fr-CA" sz="1400" kern="1200" dirty="0"/>
+            <a:t>Gérer des tâches et évènements personnelles</a:t>
           </a:r>
-          <a:endParaRPr lang="en-US" sz="1700" kern="1200"/>
+          <a:endParaRPr lang="en-US" sz="1400" kern="1200" dirty="0"/>
         </a:p>
       </dsp:txBody>
       <dsp:txXfrm>
-        <a:off x="2839594" y="2350541"/>
-        <a:ext cx="2363775" cy="720000"/>
+        <a:off x="2395200" y="2125031"/>
+        <a:ext cx="1800000" cy="720000"/>
       </dsp:txXfrm>
     </dsp:sp>
     <dsp:sp modelId="{E6F2D14D-F2B7-47C1-84A0-15CF722EA4D5}">
@@ -3552,8 +3685,8 @@
       </dsp:nvSpPr>
       <dsp:spPr>
         <a:xfrm>
-          <a:off x="6077966" y="459521"/>
-          <a:ext cx="1441902" cy="1441902"/>
+          <a:off x="4861200" y="685031"/>
+          <a:ext cx="1098000" cy="1098000"/>
         </a:xfrm>
         <a:prstGeom prst="round2DiagRect">
           <a:avLst>
@@ -3594,8 +3727,8 @@
       </dsp:nvSpPr>
       <dsp:spPr>
         <a:xfrm>
-          <a:off x="6385257" y="766811"/>
-          <a:ext cx="827321" cy="827321"/>
+          <a:off x="5095200" y="919031"/>
+          <a:ext cx="630000" cy="630000"/>
         </a:xfrm>
         <a:prstGeom prst="rect">
           <a:avLst/>
@@ -3643,8 +3776,8 @@
       </dsp:nvSpPr>
       <dsp:spPr>
         <a:xfrm>
-          <a:off x="5617030" y="2350541"/>
-          <a:ext cx="2363775" cy="720000"/>
+          <a:off x="4510200" y="2125031"/>
+          <a:ext cx="1800000" cy="720000"/>
         </a:xfrm>
         <a:prstGeom prst="rect">
           <a:avLst/>
@@ -3673,9 +3806,9 @@
         </a:bodyPr>
         <a:lstStyle/>
         <a:p>
-          <a:pPr marL="0" lvl="0" indent="0" algn="ctr" defTabSz="755650">
+          <a:pPr marL="0" lvl="0" indent="0" algn="ctr" defTabSz="622300">
             <a:lnSpc>
-              <a:spcPct val="90000"/>
+              <a:spcPct val="100000"/>
             </a:lnSpc>
             <a:spcBef>
               <a:spcPct val="0"/>
@@ -3687,15 +3820,15 @@
             <a:defRPr cap="all"/>
           </a:pPr>
           <a:r>
-            <a:rPr lang="fr-CA" sz="1700" kern="1200"/>
-            <a:t>Créer des groupes / Rejoindre des groupes</a:t>
+            <a:rPr lang="fr-CA" sz="1400" kern="1200" dirty="0"/>
+            <a:t>Gérer des groupes</a:t>
           </a:r>
-          <a:endParaRPr lang="en-US" sz="1700" kern="1200"/>
+          <a:endParaRPr lang="en-US" sz="1400" kern="1200" dirty="0"/>
         </a:p>
       </dsp:txBody>
       <dsp:txXfrm>
-        <a:off x="5617030" y="2350541"/>
-        <a:ext cx="2363775" cy="720000"/>
+        <a:off x="4510200" y="2125031"/>
+        <a:ext cx="1800000" cy="720000"/>
       </dsp:txXfrm>
     </dsp:sp>
     <dsp:sp modelId="{999034A3-FEBE-40BD-80F1-55DA17190A71}">
@@ -3705,8 +3838,8 @@
       </dsp:nvSpPr>
       <dsp:spPr>
         <a:xfrm>
-          <a:off x="8855402" y="459521"/>
-          <a:ext cx="1441902" cy="1441902"/>
+          <a:off x="6976200" y="685031"/>
+          <a:ext cx="1098000" cy="1098000"/>
         </a:xfrm>
         <a:prstGeom prst="round2DiagRect">
           <a:avLst>
@@ -3747,8 +3880,8 @@
       </dsp:nvSpPr>
       <dsp:spPr>
         <a:xfrm>
-          <a:off x="9162692" y="766811"/>
-          <a:ext cx="827321" cy="827321"/>
+          <a:off x="7210200" y="919031"/>
+          <a:ext cx="630000" cy="630000"/>
         </a:xfrm>
         <a:prstGeom prst="rect">
           <a:avLst/>
@@ -3796,8 +3929,8 @@
       </dsp:nvSpPr>
       <dsp:spPr>
         <a:xfrm>
-          <a:off x="8394465" y="2350541"/>
-          <a:ext cx="2363775" cy="720000"/>
+          <a:off x="6625200" y="2125031"/>
+          <a:ext cx="1800000" cy="720000"/>
         </a:xfrm>
         <a:prstGeom prst="rect">
           <a:avLst/>
@@ -3826,9 +3959,9 @@
         </a:bodyPr>
         <a:lstStyle/>
         <a:p>
-          <a:pPr marL="0" lvl="0" indent="0" algn="ctr" defTabSz="755650">
+          <a:pPr marL="0" lvl="0" indent="0" algn="ctr" defTabSz="622300">
             <a:lnSpc>
-              <a:spcPct val="90000"/>
+              <a:spcPct val="100000"/>
             </a:lnSpc>
             <a:spcBef>
               <a:spcPct val="0"/>
@@ -3840,15 +3973,189 @@
             <a:defRPr cap="all"/>
           </a:pPr>
           <a:r>
-            <a:rPr lang="fr-CA" sz="1700" kern="1200"/>
-            <a:t>Créer des tâches et des évènements de groupe</a:t>
+            <a:rPr lang="fr-CA" sz="1400" kern="1200" dirty="0"/>
+            <a:t>Gérer des tâches et des évènements de groupe</a:t>
           </a:r>
-          <a:endParaRPr lang="en-US" sz="1700" kern="1200"/>
+          <a:endParaRPr lang="en-US" sz="1400" kern="1200" dirty="0"/>
         </a:p>
       </dsp:txBody>
       <dsp:txXfrm>
-        <a:off x="8394465" y="2350541"/>
-        <a:ext cx="2363775" cy="720000"/>
+        <a:off x="6625200" y="2125031"/>
+        <a:ext cx="1800000" cy="720000"/>
+      </dsp:txXfrm>
+    </dsp:sp>
+    <dsp:sp modelId="{B0F85070-72A9-46F3-9873-2A42EA84BFE1}">
+      <dsp:nvSpPr>
+        <dsp:cNvPr id="0" name=""/>
+        <dsp:cNvSpPr/>
+      </dsp:nvSpPr>
+      <dsp:spPr>
+        <a:xfrm>
+          <a:off x="9091200" y="685031"/>
+          <a:ext cx="1098000" cy="1098000"/>
+        </a:xfrm>
+        <a:prstGeom prst="round2DiagRect">
+          <a:avLst>
+            <a:gd name="adj1" fmla="val 29727"/>
+            <a:gd name="adj2" fmla="val 0"/>
+          </a:avLst>
+        </a:prstGeom>
+        <a:solidFill>
+          <a:schemeClr val="accent6">
+            <a:hueOff val="0"/>
+            <a:satOff val="0"/>
+            <a:lumOff val="0"/>
+            <a:alphaOff val="0"/>
+          </a:schemeClr>
+        </a:solidFill>
+        <a:ln>
+          <a:noFill/>
+        </a:ln>
+        <a:effectLst/>
+      </dsp:spPr>
+      <dsp:style>
+        <a:lnRef idx="0">
+          <a:scrgbClr r="0" g="0" b="0"/>
+        </a:lnRef>
+        <a:fillRef idx="1">
+          <a:scrgbClr r="0" g="0" b="0"/>
+        </a:fillRef>
+        <a:effectRef idx="0">
+          <a:scrgbClr r="0" g="0" b="0"/>
+        </a:effectRef>
+        <a:fontRef idx="minor"/>
+      </dsp:style>
+    </dsp:sp>
+    <dsp:sp modelId="{737D955B-A71D-4147-A0EC-5C5E110D9B87}">
+      <dsp:nvSpPr>
+        <dsp:cNvPr id="0" name=""/>
+        <dsp:cNvSpPr/>
+      </dsp:nvSpPr>
+      <dsp:spPr>
+        <a:xfrm>
+          <a:off x="9325199" y="919031"/>
+          <a:ext cx="630000" cy="630000"/>
+        </a:xfrm>
+        <a:prstGeom prst="rect">
+          <a:avLst/>
+        </a:prstGeom>
+        <a:blipFill>
+          <a:blip xmlns:r="http://schemas.openxmlformats.org/officeDocument/2006/relationships" r:embed="rId9">
+            <a:extLst>
+              <a:ext uri="{28A0092B-C50C-407E-A947-70E740481C1C}">
+                <a14:useLocalDpi xmlns:a14="http://schemas.microsoft.com/office/drawing/2010/main" val="0"/>
+              </a:ext>
+              <a:ext uri="{96DAC541-7B7A-43D3-8B79-37D633B846F1}">
+                <asvg:svgBlip xmlns:asvg="http://schemas.microsoft.com/office/drawing/2016/SVG/main" r:embed="rId10"/>
+              </a:ext>
+            </a:extLst>
+          </a:blip>
+          <a:srcRect/>
+          <a:stretch>
+            <a:fillRect/>
+          </a:stretch>
+        </a:blipFill>
+        <a:ln w="12700" cap="flat" cmpd="sng" algn="ctr">
+          <a:solidFill>
+            <a:schemeClr val="lt1">
+              <a:alpha val="0"/>
+              <a:hueOff val="0"/>
+              <a:satOff val="0"/>
+              <a:lumOff val="0"/>
+              <a:alphaOff val="0"/>
+            </a:schemeClr>
+          </a:solidFill>
+          <a:prstDash val="solid"/>
+        </a:ln>
+        <a:effectLst/>
+      </dsp:spPr>
+      <dsp:style>
+        <a:lnRef idx="2">
+          <a:scrgbClr r="0" g="0" b="0"/>
+        </a:lnRef>
+        <a:fillRef idx="1">
+          <a:scrgbClr r="0" g="0" b="0"/>
+        </a:fillRef>
+        <a:effectRef idx="0">
+          <a:scrgbClr r="0" g="0" b="0"/>
+        </a:effectRef>
+        <a:fontRef idx="minor">
+          <a:schemeClr val="lt1"/>
+        </a:fontRef>
+      </dsp:style>
+    </dsp:sp>
+    <dsp:sp modelId="{7B51D551-E7FF-492B-8EF0-7C0788E58E24}">
+      <dsp:nvSpPr>
+        <dsp:cNvPr id="0" name=""/>
+        <dsp:cNvSpPr/>
+      </dsp:nvSpPr>
+      <dsp:spPr>
+        <a:xfrm>
+          <a:off x="8740200" y="2125031"/>
+          <a:ext cx="1800000" cy="720000"/>
+        </a:xfrm>
+        <a:prstGeom prst="rect">
+          <a:avLst/>
+        </a:prstGeom>
+        <a:noFill/>
+        <a:ln>
+          <a:noFill/>
+        </a:ln>
+        <a:effectLst/>
+      </dsp:spPr>
+      <dsp:style>
+        <a:lnRef idx="0">
+          <a:scrgbClr r="0" g="0" b="0"/>
+        </a:lnRef>
+        <a:fillRef idx="0">
+          <a:scrgbClr r="0" g="0" b="0"/>
+        </a:fillRef>
+        <a:effectRef idx="0">
+          <a:scrgbClr r="0" g="0" b="0"/>
+        </a:effectRef>
+        <a:fontRef idx="minor"/>
+      </dsp:style>
+      <dsp:txBody>
+        <a:bodyPr spcFirstLastPara="0" vert="horz" wrap="square" lIns="0" tIns="0" rIns="0" bIns="0" numCol="1" spcCol="1270" anchor="t" anchorCtr="0">
+          <a:noAutofit/>
+        </a:bodyPr>
+        <a:lstStyle/>
+        <a:p>
+          <a:pPr marL="0" lvl="0" indent="0" algn="ctr" defTabSz="622300">
+            <a:lnSpc>
+              <a:spcPct val="100000"/>
+            </a:lnSpc>
+            <a:spcBef>
+              <a:spcPct val="0"/>
+            </a:spcBef>
+            <a:spcAft>
+              <a:spcPct val="35000"/>
+            </a:spcAft>
+            <a:buNone/>
+            <a:defRPr cap="all"/>
+          </a:pPr>
+          <a:r>
+            <a:rPr lang="en-CA" sz="1400" kern="1200" dirty="0"/>
+            <a:t>Chat </a:t>
+          </a:r>
+          <a:r>
+            <a:rPr lang="en-CA" sz="1400" kern="1200" dirty="0" err="1"/>
+            <a:t>en</a:t>
+          </a:r>
+          <a:r>
+            <a:rPr lang="en-CA" sz="1400" kern="1200" dirty="0"/>
+            <a:t> temps r</a:t>
+          </a:r>
+          <a:r>
+            <a:rPr lang="fr-CA" sz="1400" kern="1200" dirty="0" err="1"/>
+            <a:t>éelle</a:t>
+          </a:r>
+          <a:endParaRPr lang="en-US" sz="1400" kern="1200" dirty="0"/>
+        </a:p>
+      </dsp:txBody>
+      <dsp:txXfrm>
+        <a:off x="8740200" y="2125031"/>
+        <a:ext cx="1800000" cy="720000"/>
       </dsp:txXfrm>
     </dsp:sp>
   </dsp:spTree>
@@ -12081,7 +12388,7 @@
         <p:spPr>
           <a:xfrm>
             <a:off x="685800" y="2923638"/>
-            <a:ext cx="10820400" cy="1514880"/>
+            <a:ext cx="10820400" cy="1787412"/>
           </a:xfrm>
           <a:prstGeom prst="rect">
             <a:avLst/>
@@ -12108,7 +12415,7 @@
                 <a:ea typeface="+mn-ea"/>
                 <a:cs typeface="+mn-cs"/>
               </a:rPr>
-              <a:t>Le but de l’application est de permettre de gérer un agenda personnel ou de groupe pour suivre et distribuer des tâches et évènements de façon accessible depuis n’importe quel appareil. Plus tard le but sera de relié les tâches et les évènements autant personnel que de groupe à des alertes SMS pour ne pas oublier ou être en retard. De plus, on voudrait y ajouter un chat en temps réelle pour des discussion privé et des discussion publique comme un forum.</a:t>
+              <a:t>Le but de l’application est de permettre de gérer un agenda personnel ou de groupe pour suivre et distribuer des tâches et évènements de façon accessible depuis n’importe quel appareil. De plus, l’application permet de chatter en temps réelle en discussion privé ou en discussion publique avec tous les gens connecter. Plus tard le but sera de relié les tâches et les évènements autant personnel que de groupe à des alertes SMS pour ne pas oublier ou être en retard. </a:t>
             </a:r>
             <a:endParaRPr lang="en-US" dirty="0"/>
           </a:p>
@@ -12290,16 +12597,8 @@
           <a:lstStyle/>
           <a:p>
             <a:r>
-              <a:rPr lang="fr-CA" dirty="0"/>
-              <a:t>Que </a:t>
-            </a:r>
-            <a:r>
-              <a:rPr lang="fr-CA" dirty="0" err="1"/>
-              <a:t>Event</a:t>
-            </a:r>
-            <a:r>
-              <a:rPr lang="fr-CA" dirty="0"/>
-              <a:t> Flow Planner permet de faire ?</a:t>
+              <a:rPr lang="fr-CA"/>
+              <a:t>Que Event Flow Planner permet de faire ?</a:t>
             </a:r>
             <a:endParaRPr lang="en-US" dirty="0"/>
           </a:p>
@@ -12321,7 +12620,7 @@
             <p:ph idx="1"/>
             <p:extLst>
               <p:ext uri="{D42A27DB-BD31-4B8C-83A1-F6EECF244321}">
-                <p14:modId xmlns:p14="http://schemas.microsoft.com/office/powerpoint/2010/main" val="79994553"/>
+                <p14:modId xmlns:p14="http://schemas.microsoft.com/office/powerpoint/2010/main" val="1459802816"/>
               </p:ext>
             </p:extLst>
           </p:nvPr>
